--- a/g13_s1_net/Milestone-3_s1_g13_net/PPT for video/Milestone 3_ppt.pptx
+++ b/g13_s1_net/Milestone-3_s1_g13_net/PPT for video/Milestone 3_ppt.pptx
@@ -997,7 +997,7 @@
           <a:p>
             <a:fld id="{1D8BD707-D9CF-40AE-B4C6-C98DA3205C09}" type="datetimeFigureOut">
               <a:rPr lang="en-US"/>
-              <a:t>3/10/2026</a:t>
+              <a:t>3/29/2026</a:t>
             </a:fld>
             <a:endParaRPr lang="en-US"/>
           </a:p>
@@ -1174,7 +1174,7 @@
           <a:p>
             <a:fld id="{1D8BD707-D9CF-40AE-B4C6-C98DA3205C09}" type="datetimeFigureOut">
               <a:rPr lang="en-US"/>
-              <a:t>3/10/2026</a:t>
+              <a:t>3/29/2026</a:t>
             </a:fld>
             <a:endParaRPr lang="en-US"/>
           </a:p>
@@ -1546,7 +1546,7 @@
           <a:p>
             <a:fld id="{1D8BD707-D9CF-40AE-B4C6-C98DA3205C09}" type="datetimeFigureOut">
               <a:rPr lang="en-US"/>
-              <a:t>3/10/2026</a:t>
+              <a:t>3/29/2026</a:t>
             </a:fld>
             <a:endParaRPr lang="en-US"/>
           </a:p>
@@ -1694,7 +1694,7 @@
           <a:p>
             <a:fld id="{1D8BD707-D9CF-40AE-B4C6-C98DA3205C09}" type="datetimeFigureOut">
               <a:rPr lang="en-US"/>
-              <a:t>3/10/2026</a:t>
+              <a:t>3/29/2026</a:t>
             </a:fld>
             <a:endParaRPr lang="en-US"/>
           </a:p>
@@ -1871,7 +1871,7 @@
           <a:p>
             <a:fld id="{1D8BD707-D9CF-40AE-B4C6-C98DA3205C09}" type="datetimeFigureOut">
               <a:rPr lang="en-US"/>
-              <a:t>3/10/2026</a:t>
+              <a:t>3/29/2026</a:t>
             </a:fld>
             <a:endParaRPr lang="en-US"/>
           </a:p>
@@ -2212,7 +2212,7 @@
           <a:p>
             <a:fld id="{1D8BD707-D9CF-40AE-B4C6-C98DA3205C09}" type="datetimeFigureOut">
               <a:rPr lang="en-US"/>
-              <a:t>3/10/2026</a:t>
+              <a:t>3/29/2026</a:t>
             </a:fld>
             <a:endParaRPr lang="en-US"/>
           </a:p>
@@ -2816,7 +2816,7 @@
         <p:spPr>
           <a:xfrm>
             <a:off x="1090848" y="2095500"/>
-            <a:ext cx="13360400" cy="8032968"/>
+            <a:ext cx="13360400" cy="6647974"/>
           </a:xfrm>
         </p:spPr>
         <p:txBody>
@@ -2830,6 +2830,45 @@
             <a:endParaRPr lang="en-US" b="1" dirty="0"/>
           </a:p>
           <a:p>
+            <a:r>
+              <a:rPr lang="en-US" b="1" dirty="0"/>
+              <a:t>Expected Results</a:t>
+            </a:r>
+          </a:p>
+          <a:p>
+            <a:r>
+              <a:rPr lang="en-US" b="1" dirty="0"/>
+              <a:t>Randomized BEBA</a:t>
+            </a:r>
+            <a:r>
+              <a:rPr lang="en-US" dirty="0"/>
+              <a:t> should show:</a:t>
+            </a:r>
+          </a:p>
+          <a:p>
+            <a:r>
+              <a:rPr lang="en-US" dirty="0"/>
+              <a:t>Lower collision rates</a:t>
+            </a:r>
+          </a:p>
+          <a:p>
+            <a:r>
+              <a:rPr lang="en-US" dirty="0"/>
+              <a:t>Better throughput at high load</a:t>
+            </a:r>
+          </a:p>
+          <a:p>
+            <a:r>
+              <a:rPr lang="en-US" dirty="0"/>
+              <a:t>More stable </a:t>
+            </a:r>
+            <a:r>
+              <a:rPr lang="en-US" dirty="0" smtClean="0"/>
+              <a:t>performance</a:t>
+            </a:r>
+            <a:endParaRPr lang="en-US" b="1" dirty="0"/>
+          </a:p>
+          <a:p>
             <a:pPr marL="571500" indent="-571500">
               <a:buFont typeface="Arial" panose="020B0604020202020204" pitchFamily="34" charset="0"/>
               <a:buChar char="•"/>
@@ -2837,156 +2876,50 @@
             <a:endParaRPr lang="en-US" b="1" dirty="0"/>
           </a:p>
           <a:p>
-            <a:pPr marL="571500" indent="-571500">
-              <a:buFont typeface="Arial" panose="020B0604020202020204" pitchFamily="34" charset="0"/>
-              <a:buChar char="•"/>
-            </a:pPr>
-            <a:endParaRPr lang="en-US" b="1" dirty="0"/>
-          </a:p>
-          <a:p>
-            <a:pPr marL="571500" indent="-571500">
-              <a:buFont typeface="Arial" panose="020B0604020202020204" pitchFamily="34" charset="0"/>
-              <a:buChar char="•"/>
-            </a:pPr>
-            <a:endParaRPr lang="en-US" b="1" dirty="0"/>
-          </a:p>
-          <a:p>
-            <a:pPr marL="571500" indent="-571500">
-              <a:buFont typeface="Arial" panose="020B0604020202020204" pitchFamily="34" charset="0"/>
-              <a:buChar char="•"/>
-            </a:pPr>
-            <a:endParaRPr lang="en-US" b="1" dirty="0"/>
-          </a:p>
-          <a:p>
-            <a:pPr marL="571500" indent="-571500">
-              <a:buFont typeface="Arial" panose="020B0604020202020204" pitchFamily="34" charset="0"/>
-              <a:buChar char="•"/>
-            </a:pPr>
-            <a:endParaRPr lang="en-US" b="1" dirty="0"/>
-          </a:p>
-          <a:p>
-            <a:pPr marL="571500" indent="-571500">
-              <a:buFont typeface="Arial" panose="020B0604020202020204" pitchFamily="34" charset="0"/>
-              <a:buChar char="•"/>
-            </a:pPr>
-            <a:endParaRPr lang="en-US" b="1" dirty="0"/>
-          </a:p>
-          <a:p>
-            <a:pPr marL="571500" indent="-571500">
-              <a:buFont typeface="Arial" panose="020B0604020202020204" pitchFamily="34" charset="0"/>
-              <a:buChar char="•"/>
-            </a:pPr>
-            <a:endParaRPr lang="en-US" b="1" dirty="0"/>
-          </a:p>
-          <a:p>
-            <a:pPr marL="571500" indent="-571500">
-              <a:lnSpc>
-                <a:spcPct val="150000"/>
-              </a:lnSpc>
-              <a:buFont typeface="Arial" panose="020B0604020202020204" pitchFamily="34" charset="0"/>
-              <a:buChar char="•"/>
-            </a:pPr>
-            <a:endParaRPr lang="en-US" b="1" dirty="0"/>
-          </a:p>
-          <a:p>
-            <a:pPr marL="571500" indent="-571500">
-              <a:buFont typeface="Arial" panose="020B0604020202020204" pitchFamily="34" charset="0"/>
-              <a:buChar char="•"/>
-            </a:pPr>
             <a:r>
               <a:rPr lang="en-US" b="1" dirty="0"/>
-              <a:t>Observations</a:t>
-            </a:r>
-          </a:p>
-          <a:p>
+              <a:t>Key Metrics</a:t>
+            </a:r>
+          </a:p>
+          <a:p>
+            <a:r>
+              <a:rPr lang="en-US" b="1" dirty="0"/>
+              <a:t>Throughput</a:t>
+            </a:r>
             <a:r>
               <a:rPr lang="en-US" dirty="0"/>
-              <a:t>    - Throughput increases initially with traffic</a:t>
-            </a:r>
-            <a:br>
+              <a:t> → System efficiency</a:t>
+            </a:r>
+          </a:p>
+          <a:p>
+            <a:r>
+              <a:rPr lang="en-US" b="1" dirty="0"/>
+              <a:t>Collision probability</a:t>
+            </a:r>
+            <a:r>
               <a:rPr lang="en-US" dirty="0"/>
-            </a:br>
+              <a:t> → Network stability</a:t>
+            </a:r>
+          </a:p>
+          <a:p>
+            <a:r>
+              <a:rPr lang="en-US" b="1" dirty="0"/>
+              <a:t>Channel utilization</a:t>
+            </a:r>
             <a:r>
               <a:rPr lang="en-US" dirty="0"/>
-              <a:t>    - Higher traffic causes more collisions</a:t>
-            </a:r>
-            <a:br>
-              <a:rPr lang="en-US" dirty="0"/>
-            </a:br>
-            <a:r>
-              <a:rPr lang="en-US" dirty="0"/>
-              <a:t>    - Collisions reduce network throughput</a:t>
-            </a:r>
-          </a:p>
-          <a:p>
-            <a:pPr marL="571500" indent="-571500">
-              <a:buFont typeface="Arial" panose="020B0604020202020204" pitchFamily="34" charset="0"/>
-              <a:buChar char="•"/>
-            </a:pPr>
-            <a:endParaRPr lang="en-IN" dirty="0"/>
-          </a:p>
-        </p:txBody>
-      </p:sp>
-      <p:pic>
-        <p:nvPicPr>
-          <p:cNvPr id="6" name="Picture 5" descr="A graph with a line&#10;&#10;AI-generated content may be incorrect.">
-            <a:extLst>
-              <a:ext uri="{FF2B5EF4-FFF2-40B4-BE49-F238E27FC236}">
-                <a16:creationId xmlns:a16="http://schemas.microsoft.com/office/drawing/2014/main" id="{CAD96E3B-DAF1-B54B-F42C-D5A1ECEF742A}"/>
-              </a:ext>
-            </a:extLst>
-          </p:cNvPr>
-          <p:cNvPicPr>
-            <a:picLocks noChangeAspect="1"/>
-          </p:cNvPicPr>
-          <p:nvPr/>
-        </p:nvPicPr>
-        <p:blipFill>
-          <a:blip r:embed="rId2"/>
-          <a:stretch>
-            <a:fillRect/>
-          </a:stretch>
-        </p:blipFill>
-        <p:spPr>
-          <a:xfrm>
-            <a:off x="1165037" y="2106972"/>
-            <a:ext cx="7599975" cy="4527683"/>
-          </a:xfrm>
-          <a:prstGeom prst="rect">
-            <a:avLst/>
-          </a:prstGeom>
-        </p:spPr>
-      </p:pic>
-      <p:pic>
-        <p:nvPicPr>
-          <p:cNvPr id="7" name="Picture 6" descr="A graph with a line&#10;&#10;AI-generated content may be incorrect.">
-            <a:extLst>
-              <a:ext uri="{FF2B5EF4-FFF2-40B4-BE49-F238E27FC236}">
-                <a16:creationId xmlns:a16="http://schemas.microsoft.com/office/drawing/2014/main" id="{1DBB2A13-9F0D-7535-AE6D-A5F53156A4AE}"/>
-              </a:ext>
-            </a:extLst>
-          </p:cNvPr>
-          <p:cNvPicPr>
-            <a:picLocks noChangeAspect="1"/>
-          </p:cNvPicPr>
-          <p:nvPr/>
-        </p:nvPicPr>
-        <p:blipFill>
-          <a:blip r:embed="rId3"/>
-          <a:stretch>
-            <a:fillRect/>
-          </a:stretch>
-        </p:blipFill>
-        <p:spPr>
-          <a:xfrm>
-            <a:off x="8839200" y="2095500"/>
-            <a:ext cx="7620000" cy="4572000"/>
-          </a:xfrm>
-          <a:prstGeom prst="rect">
-            <a:avLst/>
-          </a:prstGeom>
-        </p:spPr>
-      </p:pic>
+              <a:t> → </a:t>
+            </a:r>
+            <a:r>
+              <a:rPr lang="en-US" dirty="0" smtClean="0"/>
+              <a:t>Effectiveness</a:t>
+            </a:r>
+          </a:p>
+          <a:p>
+            <a:endParaRPr lang="en-US" dirty="0"/>
+          </a:p>
+        </p:txBody>
+      </p:sp>
     </p:spTree>
     <p:extLst>
       <p:ext uri="{BB962C8B-B14F-4D97-AF65-F5344CB8AC3E}">
@@ -3216,7 +3149,7 @@
         <p:spPr>
           <a:xfrm>
             <a:off x="3525225" y="718422"/>
-            <a:ext cx="12141200" cy="1569660"/>
+            <a:ext cx="12141200" cy="784830"/>
           </a:xfrm>
         </p:spPr>
         <p:txBody>
@@ -3224,8 +3157,8 @@
           <a:lstStyle/>
           <a:p>
             <a:r>
-              <a:rPr lang="en-US" dirty="0"/>
-              <a:t>Planned Refinements and Role Coordination</a:t>
+              <a:rPr lang="en-IN" dirty="0"/>
+              <a:t>Key Insights</a:t>
             </a:r>
             <a:endParaRPr lang="en-IN" dirty="0"/>
           </a:p>
@@ -3250,87 +3183,91 @@
         <p:spPr>
           <a:xfrm>
             <a:off x="1090848" y="2288082"/>
-            <a:ext cx="13360400" cy="6894195"/>
+            <a:ext cx="13360400" cy="5416868"/>
           </a:xfrm>
         </p:spPr>
         <p:txBody>
           <a:bodyPr/>
           <a:lstStyle/>
           <a:p>
-            <a:pPr marL="457200" indent="-457200">
-              <a:buFont typeface="Arial" panose="020B0604020202020204" pitchFamily="34" charset="0"/>
-              <a:buChar char="•"/>
+            <a:pPr marL="514350" indent="-514350">
+              <a:buFont typeface="Wingdings" panose="05000000000000000000" pitchFamily="2" charset="2"/>
+              <a:buChar char="§"/>
             </a:pPr>
             <a:r>
-              <a:rPr lang="en-US" sz="3200" b="1" dirty="0"/>
-              <a:t>Planned Refinements</a:t>
-            </a:r>
-          </a:p>
-          <a:p>
-            <a:r>
               <a:rPr lang="en-US" sz="3200" dirty="0"/>
-              <a:t>    - Compare simulation results with analytical probability model</a:t>
-            </a:r>
-          </a:p>
-          <a:p>
+              <a:t>Randomization improves load balancing </a:t>
+            </a:r>
+            <a:endParaRPr lang="en-US" sz="3200" dirty="0" smtClean="0"/>
+          </a:p>
+          <a:p>
+            <a:pPr marL="514350" indent="-514350">
+              <a:buFont typeface="Wingdings" panose="05000000000000000000" pitchFamily="2" charset="2"/>
+              <a:buChar char="§"/>
+            </a:pPr>
+            <a:endParaRPr lang="en-US" sz="3200" dirty="0"/>
+          </a:p>
+          <a:p>
+            <a:pPr marL="514350" indent="-514350">
+              <a:buFont typeface="Wingdings" panose="05000000000000000000" pitchFamily="2" charset="2"/>
+              <a:buChar char="§"/>
+            </a:pPr>
             <a:r>
               <a:rPr lang="en-US" sz="3200" dirty="0"/>
-              <a:t>    - Study impact of increasing number of nodes on network performance</a:t>
+              <a:t>Reduces collision bursts </a:t>
+            </a:r>
+            <a:endParaRPr lang="en-US" sz="3200" dirty="0" smtClean="0"/>
+          </a:p>
+          <a:p>
+            <a:pPr marL="514350" indent="-514350">
+              <a:buFont typeface="Wingdings" panose="05000000000000000000" pitchFamily="2" charset="2"/>
+              <a:buChar char="§"/>
+            </a:pPr>
+            <a:endParaRPr lang="en-US" sz="3200" dirty="0"/>
+          </a:p>
+          <a:p>
+            <a:pPr marL="514350" indent="-514350">
+              <a:buFont typeface="Wingdings" panose="05000000000000000000" pitchFamily="2" charset="2"/>
+              <a:buChar char="§"/>
+            </a:pPr>
+            <a:r>
+              <a:rPr lang="en-US" sz="3200" dirty="0"/>
+              <a:t>Works better in high congestion </a:t>
+            </a:r>
+            <a:endParaRPr lang="en-US" sz="3200" dirty="0" smtClean="0"/>
+          </a:p>
+          <a:p>
+            <a:pPr marL="514350" indent="-514350">
+              <a:buFont typeface="Wingdings" panose="05000000000000000000" pitchFamily="2" charset="2"/>
+              <a:buChar char="§"/>
+            </a:pPr>
+            <a:endParaRPr lang="en-US" sz="3200" dirty="0"/>
+          </a:p>
+          <a:p>
+            <a:pPr marL="514350" indent="-514350">
+              <a:buFont typeface="Wingdings" panose="05000000000000000000" pitchFamily="2" charset="2"/>
+              <a:buChar char="§"/>
+            </a:pPr>
+            <a:r>
+              <a:rPr lang="en-US" sz="3200" dirty="0"/>
+              <a:t>Slight overhead but better overall performance </a:t>
+            </a:r>
+          </a:p>
+          <a:p>
+            <a:r>
+              <a:rPr lang="en-US" sz="3200" dirty="0"/>
+              <a:t/>
             </a:r>
             <a:br>
               <a:rPr lang="en-US" sz="3200" dirty="0"/>
             </a:br>
             <a:r>
               <a:rPr lang="en-US" sz="3200" dirty="0"/>
-              <a:t>    - Analyze the effect of different contention window sizes</a:t>
-            </a:r>
-          </a:p>
-          <a:p>
-            <a:r>
-              <a:rPr lang="en-US" sz="3200" dirty="0"/>
-              <a:t>    - Extend simulation to more realistic wireless scenarios</a:t>
-            </a:r>
-          </a:p>
-          <a:p>
-            <a:pPr marL="457200" indent="-457200">
-              <a:buFont typeface="Arial" panose="020B0604020202020204" pitchFamily="34" charset="0"/>
-              <a:buChar char="•"/>
-            </a:pPr>
-            <a:r>
-              <a:rPr lang="en-IN" sz="3200" b="1" dirty="0"/>
-              <a:t>Role Coordination</a:t>
-            </a:r>
-          </a:p>
-          <a:p>
-            <a:r>
-              <a:rPr lang="en-IN" sz="3200" dirty="0"/>
-              <a:t>     - Simulation Coding: Implementation of BEBA simulation in Python</a:t>
-            </a:r>
-          </a:p>
-          <a:p>
-            <a:r>
-              <a:rPr lang="en-IN" sz="3200" dirty="0"/>
-              <a:t>     - Probabilistic </a:t>
-            </a:r>
-            <a:r>
-              <a:rPr lang="en-IN" sz="3200" dirty="0" err="1"/>
-              <a:t>Modeling</a:t>
-            </a:r>
-            <a:r>
-              <a:rPr lang="en-IN" sz="3200" dirty="0"/>
-              <a:t>: Mathematical analysis of backoff and 	transmission probabilities</a:t>
-            </a:r>
-          </a:p>
-          <a:p>
-            <a:r>
-              <a:rPr lang="en-IN" sz="3200" dirty="0"/>
-              <a:t>     - Graph Plotting &amp; Analysis: Generating performance graphs and	interpreting results</a:t>
-            </a:r>
-          </a:p>
-          <a:p>
-            <a:r>
-              <a:rPr lang="en-IN" sz="3200" dirty="0"/>
-              <a:t>     - Documentation &amp; GitHub Management: Organizing code, reports, 	and project artifacts</a:t>
+              <a:t>“</a:t>
+            </a:r>
+            <a:r>
+              <a:rPr lang="en-US" sz="3200" b="1" dirty="0"/>
+              <a:t>Randomization transforms worst-case behavior into stable average-case performance.”</a:t>
             </a:r>
           </a:p>
           <a:p>
@@ -3396,8 +3333,9 @@
             <a:pPr algn="ctr"/>
             <a:r>
               <a:rPr lang="en-IN" dirty="0"/>
-              <a:t>Summary</a:t>
-            </a:r>
+              <a:t>Conclusion</a:t>
+            </a:r>
+            <a:endParaRPr lang="en-IN" dirty="0"/>
           </a:p>
         </p:txBody>
       </p:sp>
@@ -3419,56 +3357,43 @@
         </p:nvSpPr>
         <p:spPr>
           <a:xfrm>
-            <a:off x="1090848" y="2400300"/>
-            <a:ext cx="13360400" cy="3323987"/>
+            <a:off x="2362200" y="2400300"/>
+            <a:ext cx="16511352" cy="6705600"/>
           </a:xfrm>
         </p:spPr>
         <p:txBody>
           <a:bodyPr/>
           <a:lstStyle/>
           <a:p>
-            <a:pPr marL="571500" indent="-571500" algn="l">
-              <a:buFont typeface="Arial" panose="020B0604020202020204" pitchFamily="34" charset="0"/>
-              <a:buChar char="•"/>
-            </a:pPr>
             <a:r>
               <a:rPr lang="en-IN" dirty="0"/>
-              <a:t>BEBA uses randomness to reduce collisions</a:t>
-            </a:r>
-          </a:p>
-          <a:p>
-            <a:pPr marL="571500" indent="-571500" algn="l">
-              <a:buFont typeface="Arial" panose="020B0604020202020204" pitchFamily="34" charset="0"/>
-              <a:buChar char="•"/>
-            </a:pPr>
+              <a:t>Deterministic BEBA has limitations </a:t>
+            </a:r>
+          </a:p>
+          <a:p>
             <a:r>
               <a:rPr lang="en-IN" dirty="0"/>
-              <a:t>Probability theory explains channel </a:t>
+              <a:t>Randomized strategy improves system </a:t>
             </a:r>
             <a:r>
               <a:rPr lang="en-IN" dirty="0" err="1"/>
               <a:t>behavior</a:t>
             </a:r>
-            <a:endParaRPr lang="en-IN" dirty="0"/>
-          </a:p>
-          <a:p>
-            <a:pPr marL="571500" indent="-571500" algn="l">
-              <a:buFont typeface="Arial" panose="020B0604020202020204" pitchFamily="34" charset="0"/>
-              <a:buChar char="•"/>
-            </a:pPr>
             <a:r>
               <a:rPr lang="en-IN" dirty="0"/>
-              <a:t>Simulation validates theoretical predictions</a:t>
-            </a:r>
-          </a:p>
-          <a:p>
-            <a:pPr marL="571500" indent="-571500" algn="l">
-              <a:buFont typeface="Arial" panose="020B0604020202020204" pitchFamily="34" charset="0"/>
-              <a:buChar char="•"/>
-            </a:pPr>
+              <a:t> </a:t>
+            </a:r>
+          </a:p>
+          <a:p>
             <a:r>
               <a:rPr lang="en-IN" dirty="0"/>
-              <a:t>Randomized algorithms are essential for distributed network protocols</a:t>
+              <a:t>Probability theory helps design better algorithms </a:t>
+            </a:r>
+          </a:p>
+          <a:p>
+            <a:r>
+              <a:rPr lang="en-IN" dirty="0"/>
+              <a:t>Simulation validates improvements </a:t>
             </a:r>
           </a:p>
           <a:p>
@@ -3581,8 +3506,8 @@
         </p:nvSpPr>
         <p:spPr>
           <a:xfrm>
-            <a:off x="2327061" y="2644774"/>
-            <a:ext cx="15137765" cy="6280117"/>
+            <a:off x="2351590" y="2857500"/>
+            <a:ext cx="15544800" cy="4717958"/>
           </a:xfrm>
           <a:prstGeom prst="rect">
             <a:avLst/>
@@ -3594,96 +3519,72 @@
           </a:bodyPr>
           <a:lstStyle/>
           <a:p>
-            <a:pPr marL="571500" indent="-571500">
-              <a:lnSpc>
-                <a:spcPct val="150000"/>
-              </a:lnSpc>
-              <a:buFont typeface="Arial" panose="020B0604020202020204" pitchFamily="34" charset="0"/>
-              <a:buChar char="•"/>
-            </a:pPr>
-            <a:r>
-              <a:rPr lang="en-IN" sz="3600" dirty="0"/>
-              <a:t>Binary Exponential Backoff Algorithm (BEBA)</a:t>
-            </a:r>
-          </a:p>
-          <a:p>
-            <a:pPr marL="571500" indent="-571500">
-              <a:lnSpc>
-                <a:spcPct val="150000"/>
-              </a:lnSpc>
-              <a:buFont typeface="Arial" panose="020B0604020202020204" pitchFamily="34" charset="0"/>
-              <a:buChar char="•"/>
-            </a:pPr>
-            <a:r>
-              <a:rPr lang="en-IN" sz="3600" dirty="0"/>
-              <a:t>Application: Wireless LAN (IEEE 802.11)</a:t>
-            </a:r>
-          </a:p>
-          <a:p>
-            <a:pPr marL="571500" indent="-571500">
-              <a:lnSpc>
-                <a:spcPct val="150000"/>
-              </a:lnSpc>
-              <a:buFont typeface="Arial" panose="020B0604020202020204" pitchFamily="34" charset="0"/>
-              <a:buChar char="•"/>
-            </a:pPr>
-            <a:r>
-              <a:rPr lang="en-IN" sz="3600" dirty="0"/>
-              <a:t>Problem: Multiple nodes share the same channel causing collisions</a:t>
-            </a:r>
-          </a:p>
-          <a:p>
-            <a:pPr marL="571500" indent="-571500">
-              <a:lnSpc>
-                <a:spcPct val="150000"/>
-              </a:lnSpc>
-              <a:buFont typeface="Arial" panose="020B0604020202020204" pitchFamily="34" charset="0"/>
-              <a:buChar char="•"/>
-            </a:pPr>
-            <a:r>
-              <a:rPr lang="en-IN" sz="3600" dirty="0"/>
-              <a:t>Uncertainty: Random backoff times, random node activity, random collisions</a:t>
-            </a:r>
-          </a:p>
-          <a:p>
-            <a:pPr marL="571500" indent="-571500">
-              <a:lnSpc>
-                <a:spcPct val="150000"/>
-              </a:lnSpc>
-              <a:buFont typeface="Arial" panose="020B0604020202020204" pitchFamily="34" charset="0"/>
-              <a:buChar char="•"/>
-            </a:pPr>
-            <a:r>
-              <a:rPr lang="en-IN" sz="3600" dirty="0"/>
-              <a:t>Goal: Use probability and simulation to </a:t>
-            </a:r>
-            <a:r>
-              <a:rPr lang="en-IN" sz="3600" dirty="0" err="1"/>
-              <a:t>analyze</a:t>
-            </a:r>
-            <a:r>
-              <a:rPr lang="en-IN" sz="3600" dirty="0"/>
-              <a:t> network performance</a:t>
-            </a:r>
-          </a:p>
-          <a:p>
-            <a:pPr marL="584200" indent="-571500">
-              <a:lnSpc>
-                <a:spcPct val="150000"/>
-              </a:lnSpc>
-              <a:spcBef>
-                <a:spcPts val="2230"/>
-              </a:spcBef>
-              <a:buFont typeface="Arial" panose="020B0604020202020204" pitchFamily="34" charset="0"/>
-              <a:buChar char="•"/>
-              <a:tabLst>
-                <a:tab pos="4286250" algn="l"/>
-              </a:tabLst>
-            </a:pPr>
-            <a:endParaRPr sz="3600" dirty="0">
-              <a:latin typeface="Microsoft Sans Serif"/>
-              <a:cs typeface="Microsoft Sans Serif"/>
-            </a:endParaRPr>
+            <a:r>
+              <a:rPr lang="en-IN" sz="3600" dirty="0" smtClean="0"/>
+              <a:t>Application: IEEE 802.11 Wireless LAN </a:t>
+            </a:r>
+          </a:p>
+          <a:p>
+            <a:r>
+              <a:rPr lang="en-IN" sz="3600" dirty="0" smtClean="0"/>
+              <a:t>Problem: Multiple nodes → collisions → reduced throughput </a:t>
+            </a:r>
+          </a:p>
+          <a:p>
+            <a:r>
+              <a:rPr lang="en-IN" sz="3600" dirty="0" smtClean="0"/>
+              <a:t>Baseline: Binary Exponential </a:t>
+            </a:r>
+            <a:r>
+              <a:rPr lang="en-IN" sz="3600" dirty="0" err="1" smtClean="0"/>
+              <a:t>Backoff</a:t>
+            </a:r>
+            <a:r>
+              <a:rPr lang="en-IN" sz="3600" dirty="0" smtClean="0"/>
+              <a:t> Algorithm (BEBA) </a:t>
+            </a:r>
+          </a:p>
+          <a:p>
+            <a:r>
+              <a:rPr lang="en-IN" sz="3600" dirty="0" smtClean="0"/>
+              <a:t> Key Issue: Network </a:t>
+            </a:r>
+            <a:r>
+              <a:rPr lang="en-IN" sz="3600" dirty="0" err="1" smtClean="0"/>
+              <a:t>behavior</a:t>
+            </a:r>
+            <a:r>
+              <a:rPr lang="en-IN" sz="3600" dirty="0" smtClean="0"/>
+              <a:t> is inherently random </a:t>
+            </a:r>
+          </a:p>
+          <a:p>
+            <a:r>
+              <a:rPr lang="en-IN" sz="3600" dirty="0" smtClean="0"/>
+              <a:t> Goal: Improve performance using </a:t>
+            </a:r>
+            <a:r>
+              <a:rPr lang="en-IN" sz="3600" i="1" dirty="0" smtClean="0"/>
+              <a:t>controlled randomization</a:t>
+            </a:r>
+            <a:r>
+              <a:rPr lang="en-IN" sz="3600" dirty="0" smtClean="0"/>
+              <a:t> </a:t>
+            </a:r>
+          </a:p>
+          <a:p>
+            <a:r>
+              <a:rPr lang="en-IN" sz="3600" dirty="0" smtClean="0"/>
+              <a:t/>
+            </a:r>
+            <a:br>
+              <a:rPr lang="en-IN" sz="3600" dirty="0" smtClean="0"/>
+            </a:br>
+            <a:r>
+              <a:rPr lang="en-IN" sz="3600" dirty="0" smtClean="0"/>
+              <a:t>“Instead of fighting randomness, we leverage it to improve system performance.”</a:t>
+            </a:r>
+            <a:endParaRPr lang="en-IN" sz="3600" dirty="0"/>
           </a:p>
         </p:txBody>
       </p:sp>
@@ -3723,6 +3624,10 @@
           </p:nvPr>
         </p:nvSpPr>
         <p:spPr>
+          <a:xfrm>
+            <a:off x="2971124" y="513016"/>
+            <a:ext cx="12141200" cy="1582484"/>
+          </a:xfrm>
           <a:prstGeom prst="rect">
             <a:avLst/>
           </a:prstGeom>
@@ -3742,33 +3647,10 @@
               </a:spcBef>
             </a:pPr>
             <a:r>
-              <a:rPr spc="-405" dirty="0"/>
-              <a:t>Project</a:t>
-            </a:r>
-            <a:r>
-              <a:rPr spc="-330" dirty="0"/>
-              <a:t> </a:t>
-            </a:r>
-            <a:r>
-              <a:rPr spc="-385" dirty="0"/>
-              <a:t>Objective</a:t>
-            </a:r>
-            <a:r>
-              <a:rPr spc="-325" dirty="0"/>
-              <a:t> </a:t>
-            </a:r>
-            <a:r>
-              <a:rPr spc="-340" dirty="0"/>
-              <a:t>and</a:t>
-            </a:r>
-            <a:r>
-              <a:rPr spc="-330" dirty="0"/>
-              <a:t> </a:t>
-            </a:r>
-            <a:r>
-              <a:rPr spc="-395" dirty="0"/>
-              <a:t>Scope</a:t>
-            </a:r>
+              <a:rPr lang="en-IN" dirty="0"/>
+              <a:t>Deterministic Baseline Overview</a:t>
+            </a:r>
+            <a:endParaRPr spc="-395" dirty="0"/>
           </a:p>
         </p:txBody>
       </p:sp>
@@ -3790,91 +3672,93 @@
         </p:nvSpPr>
         <p:spPr>
           <a:xfrm>
-            <a:off x="1090848" y="2095500"/>
-            <a:ext cx="13360400" cy="7374006"/>
+            <a:off x="1090848" y="2857500"/>
+            <a:ext cx="15901752" cy="7078861"/>
           </a:xfrm>
         </p:spPr>
         <p:txBody>
           <a:bodyPr/>
           <a:lstStyle/>
           <a:p>
-            <a:pPr marL="571500" indent="-571500">
-              <a:lnSpc>
-                <a:spcPct val="150000"/>
-              </a:lnSpc>
-              <a:buFont typeface="Arial" panose="020B0604020202020204" pitchFamily="34" charset="0"/>
-              <a:buChar char="•"/>
-            </a:pPr>
-            <a:r>
-              <a:rPr lang="en-US" b="1" dirty="0"/>
-              <a:t>Objective:</a:t>
-            </a:r>
-            <a:r>
-              <a:rPr lang="en-US" dirty="0"/>
-              <a:t> Analyze BEBA using probabilistic modeling and simulation</a:t>
-            </a:r>
-          </a:p>
-          <a:p>
-            <a:pPr marL="571500" indent="-571500">
-              <a:lnSpc>
-                <a:spcPct val="150000"/>
-              </a:lnSpc>
-              <a:buFont typeface="Arial" panose="020B0604020202020204" pitchFamily="34" charset="0"/>
-              <a:buChar char="•"/>
-            </a:pPr>
-            <a:r>
-              <a:rPr lang="en-US" b="1" dirty="0"/>
-              <a:t>Metrics studied:</a:t>
-            </a:r>
-          </a:p>
-          <a:p>
-            <a:pPr lvl="1">
-              <a:lnSpc>
-                <a:spcPct val="150000"/>
-              </a:lnSpc>
-            </a:pPr>
-            <a:r>
-              <a:rPr lang="en-US" sz="3600" dirty="0"/>
-              <a:t>- Throughput</a:t>
-            </a:r>
-          </a:p>
-          <a:p>
-            <a:pPr lvl="1">
-              <a:lnSpc>
-                <a:spcPct val="150000"/>
-              </a:lnSpc>
-            </a:pPr>
-            <a:r>
-              <a:rPr lang="en-US" sz="3600" dirty="0"/>
-              <a:t>- Collision probability</a:t>
-            </a:r>
-          </a:p>
-          <a:p>
-            <a:pPr lvl="1">
-              <a:lnSpc>
-                <a:spcPct val="150000"/>
-              </a:lnSpc>
-            </a:pPr>
-            <a:r>
-              <a:rPr lang="en-US" sz="3600" dirty="0"/>
-              <a:t>- Channel state probabilities</a:t>
-            </a:r>
-          </a:p>
-          <a:p>
-            <a:pPr marL="571500" indent="-571500">
-              <a:lnSpc>
-                <a:spcPct val="150000"/>
-              </a:lnSpc>
-              <a:buFont typeface="Arial" panose="020B0604020202020204" pitchFamily="34" charset="0"/>
-              <a:buChar char="•"/>
-            </a:pPr>
-            <a:r>
-              <a:rPr lang="en-US" b="1" dirty="0"/>
-              <a:t>Milestone-3 focus: </a:t>
-            </a:r>
-            <a:r>
-              <a:rPr lang="en-US" dirty="0"/>
-              <a:t>Coding and simulation of the probabilistic model</a:t>
+            <a:r>
+              <a:rPr lang="en-IN" dirty="0"/>
+              <a:t>BEBA logic: </a:t>
+            </a:r>
+          </a:p>
+          <a:p>
+            <a:pPr lvl="1"/>
+            <a:r>
+              <a:rPr lang="en-IN" sz="3200" dirty="0" smtClean="0"/>
+              <a:t>Collision → Double contention window </a:t>
+            </a:r>
+          </a:p>
+          <a:p>
+            <a:pPr lvl="1"/>
+            <a:r>
+              <a:rPr lang="en-IN" sz="3200" dirty="0" smtClean="0"/>
+              <a:t>Success → Reset window</a:t>
+            </a:r>
+          </a:p>
+          <a:p>
+            <a:pPr lvl="1"/>
+            <a:r>
+              <a:rPr lang="en-IN" dirty="0" smtClean="0"/>
+              <a:t> </a:t>
+            </a:r>
+          </a:p>
+          <a:p>
+            <a:r>
+              <a:rPr lang="en-IN" dirty="0" err="1" smtClean="0"/>
+              <a:t>Backoff</a:t>
+            </a:r>
+            <a:r>
+              <a:rPr lang="en-IN" dirty="0" smtClean="0"/>
+              <a:t> chosen uniformly in [0,CW−1][0, CW-1][0,CW−1] </a:t>
+            </a:r>
+          </a:p>
+          <a:p>
+            <a:endParaRPr lang="en-IN" dirty="0"/>
+          </a:p>
+          <a:p>
+            <a:r>
+              <a:rPr lang="en-IN" b="1" dirty="0"/>
+              <a:t>Limitations:</a:t>
+            </a:r>
+            <a:endParaRPr lang="en-IN" dirty="0"/>
+          </a:p>
+          <a:p>
+            <a:r>
+              <a:rPr lang="en-IN" dirty="0"/>
+              <a:t>Same reaction for all nodes → synchronization </a:t>
+            </a:r>
+          </a:p>
+          <a:p>
+            <a:r>
+              <a:rPr lang="en-IN" dirty="0"/>
+              <a:t>Higher collisions in dense networks </a:t>
+            </a:r>
+          </a:p>
+          <a:p>
+            <a:r>
+              <a:rPr lang="en-IN" dirty="0"/>
+              <a:t>No adaptability to traffic conditions </a:t>
+            </a:r>
+          </a:p>
+          <a:p>
+            <a:r>
+              <a:rPr lang="en-IN" dirty="0" smtClean="0"/>
+              <a:t> </a:t>
+            </a:r>
+            <a:r>
+              <a:rPr lang="en-IN" dirty="0"/>
+              <a:t/>
+            </a:r>
+            <a:br>
+              <a:rPr lang="en-IN" dirty="0"/>
+            </a:br>
+            <a:r>
+              <a:rPr lang="en-IN" b="1" dirty="0"/>
+              <a:t>Deterministic rules = predictable → leads to repeated collisions</a:t>
             </a:r>
           </a:p>
           <a:p>
@@ -3982,9 +3866,14 @@
               <a:t> </a:t>
             </a:r>
             <a:r>
-              <a:rPr spc="-434" dirty="0"/>
+              <a:rPr lang="en-US" spc="-320" dirty="0" smtClean="0"/>
+              <a:t>Pipeline </a:t>
+            </a:r>
+            <a:r>
+              <a:rPr spc="-434" dirty="0" smtClean="0"/>
               <a:t>Overview</a:t>
             </a:r>
+            <a:endParaRPr spc="-434" dirty="0"/>
           </a:p>
         </p:txBody>
       </p:sp>
@@ -4007,7 +3896,7 @@
         <p:spPr>
           <a:xfrm>
             <a:off x="1090848" y="2095500"/>
-            <a:ext cx="13360400" cy="6543010"/>
+            <a:ext cx="13360400" cy="6647974"/>
           </a:xfrm>
         </p:spPr>
         <p:txBody>
@@ -4020,7 +3909,7 @@
               </a:lnSpc>
             </a:pPr>
             <a:r>
-              <a:rPr lang="en-IN" b="1" dirty="0"/>
+              <a:rPr lang="en-IN" dirty="0" smtClean="0"/>
               <a:t>System Pipeline:</a:t>
             </a:r>
           </a:p>
@@ -4031,7 +3920,7 @@
               </a:lnSpc>
             </a:pPr>
             <a:r>
-              <a:rPr lang="en-IN" dirty="0"/>
+              <a:rPr lang="en-IN" dirty="0" smtClean="0"/>
               <a:t> 1. Nodes generate packets</a:t>
             </a:r>
           </a:p>
@@ -4042,9 +3931,14 @@
               </a:lnSpc>
             </a:pPr>
             <a:r>
-              <a:rPr lang="en-IN" dirty="0"/>
-              <a:t> 2. Nodes select random backoff</a:t>
-            </a:r>
+              <a:rPr lang="en-IN" dirty="0" smtClean="0"/>
+              <a:t> 2. Nodes select random </a:t>
+            </a:r>
+            <a:r>
+              <a:rPr lang="en-IN" dirty="0" err="1" smtClean="0"/>
+              <a:t>backoff</a:t>
+            </a:r>
+            <a:endParaRPr lang="en-IN" dirty="0" smtClean="0"/>
           </a:p>
           <a:p>
             <a:pPr>
@@ -4053,8 +3947,16 @@
               </a:lnSpc>
             </a:pPr>
             <a:r>
-              <a:rPr lang="en-IN" dirty="0"/>
-              <a:t> 3. Backoff counter decreases each slot</a:t>
+              <a:rPr lang="en-IN" dirty="0" smtClean="0"/>
+              <a:t> 3. </a:t>
+            </a:r>
+            <a:r>
+              <a:rPr lang="en-IN" dirty="0" err="1" smtClean="0"/>
+              <a:t>Backoff</a:t>
+            </a:r>
+            <a:r>
+              <a:rPr lang="en-IN" dirty="0" smtClean="0"/>
+              <a:t> counter decreases each slot</a:t>
             </a:r>
           </a:p>
           <a:p>
@@ -4064,7 +3966,7 @@
               </a:lnSpc>
             </a:pPr>
             <a:r>
-              <a:rPr lang="en-IN" dirty="0"/>
+              <a:rPr lang="en-IN" dirty="0" smtClean="0"/>
               <a:t> 4. Transmission attempt when counter = 0</a:t>
             </a:r>
           </a:p>
@@ -4075,7 +3977,7 @@
               </a:lnSpc>
             </a:pPr>
             <a:r>
-              <a:rPr lang="en-IN" dirty="0"/>
+              <a:rPr lang="en-IN" dirty="0" smtClean="0"/>
               <a:t> 5. Channel outcome: Idle / Success / Collision</a:t>
             </a:r>
           </a:p>
@@ -4086,7 +3988,7 @@
               </a:lnSpc>
             </a:pPr>
             <a:r>
-              <a:rPr lang="en-IN" dirty="0"/>
+              <a:rPr lang="en-IN" dirty="0" smtClean="0"/>
               <a:t>Performance metrics measured from simulation</a:t>
             </a:r>
           </a:p>
@@ -4097,9 +3999,10 @@
               </a:lnSpc>
             </a:pPr>
             <a:r>
-              <a:rPr lang="en-IN" dirty="0"/>
+              <a:rPr lang="en-IN" dirty="0" smtClean="0"/>
               <a:t> </a:t>
             </a:r>
+            <a:endParaRPr lang="en-IN" dirty="0"/>
           </a:p>
         </p:txBody>
       </p:sp>
@@ -4245,75 +4148,167 @@
         <p:spPr>
           <a:xfrm>
             <a:off x="1090848" y="1943100"/>
-            <a:ext cx="13360400" cy="5423344"/>
+            <a:ext cx="13360400" cy="7448193"/>
           </a:xfrm>
         </p:spPr>
         <p:txBody>
           <a:bodyPr/>
           <a:lstStyle/>
           <a:p>
-            <a:pPr marL="571500" indent="-571500">
+            <a:pPr lvl="0" algn="ctr" rtl="0" eaLnBrk="0" fontAlgn="base" hangingPunct="0">
+              <a:spcBef>
+                <a:spcPct val="0"/>
+              </a:spcBef>
+              <a:spcAft>
+                <a:spcPct val="0"/>
+              </a:spcAft>
+            </a:pPr>
+            <a:endParaRPr lang="en-US" altLang="en-US" sz="4000" b="1" dirty="0"/>
+          </a:p>
+          <a:p>
+            <a:pPr lvl="0" algn="l" rtl="0" eaLnBrk="0" fontAlgn="base" hangingPunct="0">
+              <a:spcBef>
+                <a:spcPct val="0"/>
+              </a:spcBef>
+              <a:spcAft>
+                <a:spcPct val="0"/>
+              </a:spcAft>
+            </a:pPr>
+            <a:r>
+              <a:rPr lang="en-US" altLang="en-US" sz="4800" dirty="0" smtClean="0">
+                <a:solidFill>
+                  <a:schemeClr val="tx1"/>
+                </a:solidFill>
+                <a:latin typeface="Arial" panose="020B0604020202020204" pitchFamily="34" charset="0"/>
+              </a:rPr>
+              <a:t> </a:t>
+            </a:r>
+            <a:r>
+              <a:rPr lang="en-US" altLang="en-US" sz="4800" dirty="0" smtClean="0">
+                <a:solidFill>
+                  <a:schemeClr val="tx1"/>
+                </a:solidFill>
+                <a:latin typeface="Microsoft Sans Serif" panose="020B0604020202020204" pitchFamily="34" charset="0"/>
+                <a:ea typeface="Microsoft Sans Serif" panose="020B0604020202020204" pitchFamily="34" charset="0"/>
+                <a:cs typeface="Microsoft Sans Serif" panose="020B0604020202020204" pitchFamily="34" charset="0"/>
+              </a:rPr>
+              <a:t>Random </a:t>
+            </a:r>
+            <a:r>
+              <a:rPr lang="en-US" altLang="en-US" sz="4800" dirty="0" err="1">
+                <a:solidFill>
+                  <a:schemeClr val="tx1"/>
+                </a:solidFill>
+                <a:latin typeface="Microsoft Sans Serif" panose="020B0604020202020204" pitchFamily="34" charset="0"/>
+                <a:ea typeface="Microsoft Sans Serif" panose="020B0604020202020204" pitchFamily="34" charset="0"/>
+                <a:cs typeface="Microsoft Sans Serif" panose="020B0604020202020204" pitchFamily="34" charset="0"/>
+              </a:rPr>
+              <a:t>backoff</a:t>
+            </a:r>
+            <a:r>
+              <a:rPr lang="en-US" altLang="en-US" sz="4800" dirty="0">
+                <a:solidFill>
+                  <a:schemeClr val="tx1"/>
+                </a:solidFill>
+                <a:latin typeface="Microsoft Sans Serif" panose="020B0604020202020204" pitchFamily="34" charset="0"/>
+                <a:ea typeface="Microsoft Sans Serif" panose="020B0604020202020204" pitchFamily="34" charset="0"/>
+                <a:cs typeface="Microsoft Sans Serif" panose="020B0604020202020204" pitchFamily="34" charset="0"/>
+              </a:rPr>
+              <a:t> values </a:t>
+            </a:r>
+          </a:p>
+          <a:p>
+            <a:pPr lvl="0" algn="l" rtl="0" eaLnBrk="0" fontAlgn="base" hangingPunct="0">
+              <a:spcBef>
+                <a:spcPct val="0"/>
+              </a:spcBef>
+              <a:spcAft>
+                <a:spcPct val="0"/>
+              </a:spcAft>
+              <a:buFontTx/>
+              <a:buChar char="•"/>
+            </a:pPr>
+            <a:r>
+              <a:rPr lang="en-US" altLang="en-US" sz="4800" dirty="0">
+                <a:solidFill>
+                  <a:schemeClr val="tx1"/>
+                </a:solidFill>
+                <a:latin typeface="Microsoft Sans Serif" panose="020B0604020202020204" pitchFamily="34" charset="0"/>
+                <a:ea typeface="Microsoft Sans Serif" panose="020B0604020202020204" pitchFamily="34" charset="0"/>
+                <a:cs typeface="Microsoft Sans Serif" panose="020B0604020202020204" pitchFamily="34" charset="0"/>
+              </a:rPr>
+              <a:t>Random number of active nodes </a:t>
+            </a:r>
+          </a:p>
+          <a:p>
+            <a:pPr lvl="0" algn="l" rtl="0" eaLnBrk="0" fontAlgn="base" hangingPunct="0">
+              <a:spcBef>
+                <a:spcPct val="0"/>
+              </a:spcBef>
+              <a:spcAft>
+                <a:spcPct val="0"/>
+              </a:spcAft>
+              <a:buFontTx/>
+              <a:buChar char="•"/>
+            </a:pPr>
+            <a:r>
+              <a:rPr lang="en-US" altLang="en-US" sz="4800" dirty="0">
+                <a:solidFill>
+                  <a:schemeClr val="tx1"/>
+                </a:solidFill>
+                <a:latin typeface="Microsoft Sans Serif" panose="020B0604020202020204" pitchFamily="34" charset="0"/>
+                <a:ea typeface="Microsoft Sans Serif" panose="020B0604020202020204" pitchFamily="34" charset="0"/>
+                <a:cs typeface="Microsoft Sans Serif" panose="020B0604020202020204" pitchFamily="34" charset="0"/>
+              </a:rPr>
+              <a:t>Random collisions </a:t>
+            </a:r>
+          </a:p>
+          <a:p>
+            <a:pPr lvl="0" algn="l" rtl="0" eaLnBrk="0" fontAlgn="base" hangingPunct="0">
+              <a:spcBef>
+                <a:spcPct val="0"/>
+              </a:spcBef>
+              <a:spcAft>
+                <a:spcPct val="0"/>
+              </a:spcAft>
+              <a:buFontTx/>
+              <a:buChar char="•"/>
+            </a:pPr>
+            <a:r>
+              <a:rPr lang="en-US" altLang="en-US" sz="4800" dirty="0">
+                <a:solidFill>
+                  <a:schemeClr val="tx1"/>
+                </a:solidFill>
+                <a:latin typeface="Microsoft Sans Serif" panose="020B0604020202020204" pitchFamily="34" charset="0"/>
+                <a:ea typeface="Microsoft Sans Serif" panose="020B0604020202020204" pitchFamily="34" charset="0"/>
+                <a:cs typeface="Microsoft Sans Serif" panose="020B0604020202020204" pitchFamily="34" charset="0"/>
+              </a:rPr>
+              <a:t>Slot-level randomness </a:t>
+            </a:r>
+          </a:p>
+          <a:p>
+            <a:pPr>
               <a:lnSpc>
                 <a:spcPct val="150000"/>
               </a:lnSpc>
-              <a:buFont typeface="Arial" panose="020B0604020202020204" pitchFamily="34" charset="0"/>
-              <a:buChar char="•"/>
             </a:pPr>
-            <a:r>
-              <a:rPr lang="en-IN" sz="4000" dirty="0"/>
-              <a:t>Measurement Noise: Random slot outcomes</a:t>
-            </a:r>
-          </a:p>
-          <a:p>
-            <a:pPr marL="571500" indent="-571500">
+            <a:endParaRPr lang="en-US" sz="4800" b="1" dirty="0"/>
+          </a:p>
+          <a:p>
+            <a:pPr>
               <a:lnSpc>
                 <a:spcPct val="150000"/>
               </a:lnSpc>
-              <a:buFont typeface="Arial" panose="020B0604020202020204" pitchFamily="34" charset="0"/>
-              <a:buChar char="•"/>
             </a:pPr>
             <a:r>
-              <a:rPr lang="en-IN" sz="4000" dirty="0"/>
-              <a:t>Environmental Variability: Changing number of nodes</a:t>
-            </a:r>
-          </a:p>
-          <a:p>
-            <a:pPr marL="571500" indent="-571500">
-              <a:lnSpc>
-                <a:spcPct val="150000"/>
-              </a:lnSpc>
-              <a:buFont typeface="Arial" panose="020B0604020202020204" pitchFamily="34" charset="0"/>
-              <a:buChar char="•"/>
-            </a:pPr>
-            <a:r>
-              <a:rPr lang="en-IN" sz="4000" dirty="0" err="1"/>
-              <a:t>Modeling</a:t>
-            </a:r>
-            <a:r>
-              <a:rPr lang="en-IN" sz="4000" dirty="0"/>
-              <a:t> Uncertainty: Random backoff distribution</a:t>
-            </a:r>
-          </a:p>
-          <a:p>
-            <a:pPr marL="571500" indent="-571500">
-              <a:lnSpc>
-                <a:spcPct val="150000"/>
-              </a:lnSpc>
-              <a:buFont typeface="Arial" panose="020B0604020202020204" pitchFamily="34" charset="0"/>
-              <a:buChar char="•"/>
-            </a:pPr>
-            <a:r>
-              <a:rPr lang="en-IN" sz="4000" dirty="0"/>
-              <a:t>System randomness drives probabilistic </a:t>
-            </a:r>
-            <a:r>
-              <a:rPr lang="en-IN" sz="4000" dirty="0" err="1"/>
-              <a:t>behavior</a:t>
-            </a:r>
-            <a:r>
-              <a:rPr lang="en-IN" sz="4000" dirty="0"/>
-              <a:t> of the network</a:t>
-            </a:r>
+              <a:rPr lang="en-US" sz="4000" b="1" dirty="0" smtClean="0"/>
+              <a:t>Even </a:t>
+            </a:r>
+            <a:r>
+              <a:rPr lang="en-US" sz="4000" b="1" dirty="0"/>
+              <a:t>baseline system is probabilistic → deterministic control is insufficient</a:t>
+            </a:r>
+            <a:endParaRPr lang="en-IN" sz="4000" b="1" dirty="0"/>
           </a:p>
           <a:p>
             <a:pPr marL="571500" indent="-571500">
@@ -4404,8 +4399,8 @@
               </a:spcBef>
             </a:pPr>
             <a:r>
-              <a:rPr lang="en-IN" dirty="0"/>
-              <a:t>Key Random Variables</a:t>
+              <a:rPr lang="en-US" dirty="0"/>
+              <a:t>Random Variables in the System</a:t>
             </a:r>
             <a:endParaRPr spc="-355" dirty="0"/>
           </a:p>
@@ -4430,75 +4425,112 @@
         <p:spPr>
           <a:xfrm>
             <a:off x="1600200" y="2171700"/>
-            <a:ext cx="14066225" cy="5423344"/>
+            <a:ext cx="14066225" cy="5847755"/>
           </a:xfrm>
         </p:spPr>
         <p:txBody>
           <a:bodyPr/>
           <a:lstStyle/>
           <a:p>
-            <a:pPr marL="571500" indent="-571500">
-              <a:lnSpc>
-                <a:spcPct val="150000"/>
-              </a:lnSpc>
-              <a:buFont typeface="Arial" panose="020B0604020202020204" pitchFamily="34" charset="0"/>
-              <a:buChar char="•"/>
-            </a:pPr>
-            <a:r>
-              <a:rPr lang="en-US" sz="4000" dirty="0"/>
-              <a:t>r : Backoff counter value</a:t>
-            </a:r>
-          </a:p>
-          <a:p>
-            <a:pPr marL="571500" indent="-571500">
-              <a:lnSpc>
-                <a:spcPct val="150000"/>
-              </a:lnSpc>
-              <a:buFont typeface="Arial" panose="020B0604020202020204" pitchFamily="34" charset="0"/>
-              <a:buChar char="•"/>
-            </a:pPr>
-            <a:r>
-              <a:rPr lang="en-US" sz="4000" dirty="0"/>
-              <a:t>τ : Transmission attempt probability</a:t>
-            </a:r>
-          </a:p>
-          <a:p>
-            <a:pPr marL="571500" indent="-571500">
-              <a:lnSpc>
-                <a:spcPct val="150000"/>
-              </a:lnSpc>
-              <a:buFont typeface="Arial" panose="020B0604020202020204" pitchFamily="34" charset="0"/>
-              <a:buChar char="•"/>
-            </a:pPr>
-            <a:r>
-              <a:rPr lang="en-US" sz="4000" dirty="0"/>
-              <a:t>N : Number of stations</a:t>
-            </a:r>
-          </a:p>
-          <a:p>
-            <a:pPr marL="571500" indent="-571500">
-              <a:lnSpc>
-                <a:spcPct val="150000"/>
-              </a:lnSpc>
-              <a:buFont typeface="Arial" panose="020B0604020202020204" pitchFamily="34" charset="0"/>
-              <a:buChar char="•"/>
-            </a:pPr>
-            <a:r>
-              <a:rPr lang="en-US" sz="4000" dirty="0"/>
-              <a:t>Bk : Number of transmitting stations</a:t>
-            </a:r>
-          </a:p>
-          <a:p>
-            <a:pPr marL="571500" indent="-571500">
-              <a:lnSpc>
-                <a:spcPct val="150000"/>
-              </a:lnSpc>
-              <a:buFont typeface="Arial" panose="020B0604020202020204" pitchFamily="34" charset="0"/>
-              <a:buChar char="•"/>
-            </a:pPr>
-            <a:r>
-              <a:rPr lang="en-US" sz="4000" dirty="0"/>
-              <a:t>Channel state: Idle, Success, Collision</a:t>
+            <a:r>
+              <a:rPr lang="en-IN" sz="4000" dirty="0" smtClean="0"/>
+              <a:t>r: </a:t>
+            </a:r>
+            <a:r>
+              <a:rPr lang="en-IN" sz="4000" dirty="0" err="1"/>
+              <a:t>Backoff</a:t>
+            </a:r>
+            <a:r>
+              <a:rPr lang="en-IN" sz="4000" dirty="0"/>
+              <a:t> counter </a:t>
+            </a:r>
+          </a:p>
+          <a:p>
+            <a:r>
+              <a:rPr lang="el-GR" sz="4000" dirty="0" smtClean="0"/>
+              <a:t>τ</a:t>
+            </a:r>
+            <a:r>
+              <a:rPr lang="el-GR" sz="4000" dirty="0"/>
+              <a:t>: </a:t>
+            </a:r>
+            <a:r>
+              <a:rPr lang="en-IN" sz="4000" dirty="0"/>
+              <a:t>Transmission probability </a:t>
+            </a:r>
+          </a:p>
+          <a:p>
+            <a:r>
+              <a:rPr lang="en-IN" sz="4000" dirty="0" smtClean="0"/>
+              <a:t>N: </a:t>
+            </a:r>
+            <a:r>
+              <a:rPr lang="en-IN" sz="4000" dirty="0"/>
+              <a:t>Number of nodes </a:t>
+            </a:r>
+          </a:p>
+          <a:p>
+            <a:r>
+              <a:rPr lang="en-IN" sz="4000" dirty="0" smtClean="0"/>
+              <a:t>Bk​</a:t>
+            </a:r>
+            <a:r>
+              <a:rPr lang="en-IN" sz="4000" dirty="0"/>
+              <a:t>: Number of transmitting nodes </a:t>
+            </a:r>
+          </a:p>
+          <a:p>
+            <a:r>
+              <a:rPr lang="en-IN" sz="4000" b="1" dirty="0"/>
+              <a:t>Channel Probabilities:</a:t>
+            </a:r>
+            <a:endParaRPr lang="en-IN" sz="4000" dirty="0"/>
+          </a:p>
+          <a:p>
+            <a:r>
+              <a:rPr lang="en-IN" sz="4000" dirty="0"/>
+              <a:t>Idle: (1−</a:t>
+            </a:r>
+            <a:r>
+              <a:rPr lang="el-GR" sz="4000" dirty="0"/>
+              <a:t>τ</a:t>
+            </a:r>
+            <a:r>
+              <a:rPr lang="el-GR" sz="4000" dirty="0" smtClean="0"/>
+              <a:t>)</a:t>
+            </a:r>
+            <a:r>
+              <a:rPr lang="en-IN" sz="4000" dirty="0" smtClean="0"/>
+              <a:t>^N</a:t>
+            </a:r>
+            <a:endParaRPr lang="en-IN" sz="4000" dirty="0"/>
+          </a:p>
+          <a:p>
+            <a:r>
+              <a:rPr lang="en-IN" sz="4000" dirty="0"/>
+              <a:t>Success: N</a:t>
+            </a:r>
+            <a:r>
+              <a:rPr lang="el-GR" sz="4000" dirty="0"/>
+              <a:t>τ(1−τ</a:t>
+            </a:r>
+            <a:r>
+              <a:rPr lang="el-GR" sz="4000" dirty="0" smtClean="0"/>
+              <a:t>)</a:t>
+            </a:r>
+            <a:r>
+              <a:rPr lang="en-IN" sz="4000" dirty="0" smtClean="0"/>
+              <a:t>^(N-1)</a:t>
+            </a:r>
+          </a:p>
+          <a:p>
+            <a:r>
+              <a:rPr lang="en-IN" sz="4000" dirty="0" smtClean="0"/>
+              <a:t>Collision</a:t>
+            </a:r>
+            <a:r>
+              <a:rPr lang="en-IN" sz="4000" dirty="0"/>
+              <a:t>: remaining probability</a:t>
             </a:r>
           </a:p>
           <a:p>
@@ -4549,6 +4581,10 @@
           </p:nvPr>
         </p:nvSpPr>
         <p:spPr>
+          <a:xfrm>
+            <a:off x="3525225" y="718422"/>
+            <a:ext cx="12141200" cy="1286627"/>
+          </a:xfrm>
           <a:prstGeom prst="rect">
             <a:avLst/>
           </a:prstGeom>
@@ -4566,7 +4602,7 @@
             </a:pPr>
             <a:r>
               <a:rPr lang="en-IN" dirty="0"/>
-              <a:t>Probabilistic Models and Assumptions</a:t>
+              <a:t>Randomized Algorithm Design</a:t>
             </a:r>
             <a:endParaRPr spc="-64" dirty="0"/>
           </a:p>
@@ -4591,91 +4627,72 @@
         <p:spPr>
           <a:xfrm>
             <a:off x="1090848" y="3086100"/>
-            <a:ext cx="13360400" cy="6543010"/>
+            <a:ext cx="13360400" cy="5712013"/>
           </a:xfrm>
         </p:spPr>
         <p:txBody>
           <a:bodyPr/>
           <a:lstStyle/>
           <a:p>
-            <a:pPr marL="571500" indent="-571500">
-              <a:lnSpc>
-                <a:spcPct val="150000"/>
-              </a:lnSpc>
-              <a:buFont typeface="Arial" panose="020B0604020202020204" pitchFamily="34" charset="0"/>
-              <a:buChar char="•"/>
-            </a:pPr>
-            <a:r>
-              <a:rPr lang="en-US" dirty="0"/>
-              <a:t>Backoff Distribution: Uniform(0, CW−1)</a:t>
-            </a:r>
-          </a:p>
-          <a:p>
-            <a:pPr marL="571500" indent="-571500">
-              <a:lnSpc>
-                <a:spcPct val="150000"/>
-              </a:lnSpc>
-              <a:buFont typeface="Arial" panose="020B0604020202020204" pitchFamily="34" charset="0"/>
-              <a:buChar char="•"/>
-            </a:pPr>
-            <a:r>
-              <a:rPr lang="en-US" dirty="0"/>
-              <a:t>Assumptions:</a:t>
-            </a:r>
-          </a:p>
-          <a:p>
-            <a:pPr>
-              <a:lnSpc>
-                <a:spcPct val="150000"/>
-              </a:lnSpc>
-            </a:pPr>
-            <a:r>
-              <a:rPr lang="en-US" dirty="0"/>
-              <a:t>	- Saturated stations (always have packets)</a:t>
-            </a:r>
-          </a:p>
-          <a:p>
-            <a:pPr>
-              <a:lnSpc>
-                <a:spcPct val="150000"/>
-              </a:lnSpc>
-            </a:pPr>
-            <a:r>
-              <a:rPr lang="en-US" dirty="0"/>
-              <a:t>	- Ideal channel (no noise)</a:t>
-            </a:r>
-          </a:p>
-          <a:p>
-            <a:pPr>
-              <a:lnSpc>
-                <a:spcPct val="150000"/>
-              </a:lnSpc>
-            </a:pPr>
-            <a:r>
-              <a:rPr lang="en-US" dirty="0"/>
-              <a:t>	- All stations hear each other</a:t>
-            </a:r>
-          </a:p>
-          <a:p>
-            <a:pPr>
-              <a:lnSpc>
-                <a:spcPct val="150000"/>
-              </a:lnSpc>
-            </a:pPr>
-            <a:r>
-              <a:rPr lang="en-US" dirty="0"/>
-              <a:t>	- Time divided into discrete slots</a:t>
-            </a:r>
-          </a:p>
-          <a:p>
-            <a:pPr>
-              <a:lnSpc>
-                <a:spcPct val="150000"/>
-              </a:lnSpc>
-            </a:pPr>
-            <a:r>
-              <a:rPr lang="en-US" dirty="0"/>
-              <a:t>	- Independent transmission attempts across stations</a:t>
+            <a:r>
+              <a:rPr lang="en-IN" b="1" dirty="0"/>
+              <a:t>Adaptive Randomized </a:t>
+            </a:r>
+            <a:r>
+              <a:rPr lang="en-IN" b="1" dirty="0" err="1"/>
+              <a:t>Backoff</a:t>
+            </a:r>
+            <a:r>
+              <a:rPr lang="en-IN" b="1" dirty="0"/>
+              <a:t> Strategy</a:t>
+            </a:r>
+          </a:p>
+          <a:p>
+            <a:r>
+              <a:rPr lang="en-IN" b="1" dirty="0"/>
+              <a:t>After Collision</a:t>
+            </a:r>
+          </a:p>
+          <a:p>
+            <a:r>
+              <a:rPr lang="en-IN" dirty="0"/>
+              <a:t>Increase CW with probability p</a:t>
+            </a:r>
+          </a:p>
+          <a:p>
+            <a:r>
+              <a:rPr lang="en-IN" dirty="0"/>
+              <a:t>Keep CW same with probability 1-p</a:t>
+            </a:r>
+          </a:p>
+          <a:p>
+            <a:r>
+              <a:rPr lang="en-IN" b="1" dirty="0"/>
+              <a:t>After Success</a:t>
+            </a:r>
+          </a:p>
+          <a:p>
+            <a:r>
+              <a:rPr lang="en-IN" dirty="0"/>
+              <a:t>Reset CW with probability q</a:t>
+            </a:r>
+          </a:p>
+          <a:p>
+            <a:r>
+              <a:rPr lang="en-IN" dirty="0"/>
+              <a:t>Reduce gradually with probability 1-q</a:t>
+            </a:r>
+          </a:p>
+          <a:p>
+            <a:r>
+              <a:rPr lang="en-IN" b="1" dirty="0"/>
+              <a:t>Non-Uniform Distribution</a:t>
+            </a:r>
+          </a:p>
+          <a:p>
+            <a:r>
+              <a:rPr lang="en-IN" dirty="0"/>
+              <a:t>Bias toward larger values under congestion</a:t>
             </a:r>
           </a:p>
           <a:p>
@@ -4773,130 +4790,63 @@
         <p:spPr>
           <a:xfrm>
             <a:off x="1090848" y="2171700"/>
-            <a:ext cx="13360400" cy="5712013"/>
+            <a:ext cx="13360400" cy="7478970"/>
           </a:xfrm>
         </p:spPr>
         <p:txBody>
           <a:bodyPr/>
           <a:lstStyle/>
           <a:p>
-            <a:pPr marL="571500" indent="-571500">
-              <a:lnSpc>
-                <a:spcPct val="150000"/>
-              </a:lnSpc>
-              <a:buFont typeface="Arial" panose="020B0604020202020204" pitchFamily="34" charset="0"/>
-              <a:buChar char="•"/>
-            </a:pPr>
+            <a:endParaRPr lang="en-US" b="1" dirty="0" smtClean="0"/>
+          </a:p>
+          <a:p>
+            <a:r>
+              <a:rPr lang="en-IN" b="1" dirty="0"/>
+              <a:t>Why Randomization Works</a:t>
+            </a:r>
+          </a:p>
+          <a:p>
+            <a:endParaRPr lang="en-IN" b="1" dirty="0" smtClean="0"/>
+          </a:p>
+          <a:p>
+            <a:r>
+              <a:rPr lang="en-IN" b="1" dirty="0" smtClean="0"/>
+              <a:t>Breaks </a:t>
+            </a:r>
+            <a:r>
+              <a:rPr lang="en-IN" b="1" dirty="0"/>
+              <a:t>Synchronization</a:t>
+            </a:r>
+          </a:p>
+          <a:p>
             <a:r>
               <a:rPr lang="en-IN" dirty="0"/>
-              <a:t>Random Backoff → Random Transmission Attempts</a:t>
-            </a:r>
-          </a:p>
-          <a:p>
-            <a:pPr marL="571500" indent="-571500">
-              <a:lnSpc>
-                <a:spcPct val="150000"/>
-              </a:lnSpc>
-              <a:buFont typeface="Arial" panose="020B0604020202020204" pitchFamily="34" charset="0"/>
-              <a:buChar char="•"/>
-            </a:pPr>
+              <a:t>Randomization reduces node synchronization and spreads transmission attempts over time</a:t>
+            </a:r>
+          </a:p>
+          <a:p>
+            <a:r>
+              <a:rPr lang="en-IN" b="1" dirty="0"/>
+              <a:t>Reduces Simultaneity</a:t>
+            </a:r>
+          </a:p>
+          <a:p>
             <a:r>
               <a:rPr lang="en-IN" dirty="0"/>
-              <a:t>Number of transmitting stations follows Binomial distribution</a:t>
-            </a:r>
-          </a:p>
-          <a:p>
-            <a:pPr marL="571500" indent="-571500">
-              <a:lnSpc>
-                <a:spcPct val="150000"/>
-              </a:lnSpc>
-              <a:buFont typeface="Arial" panose="020B0604020202020204" pitchFamily="34" charset="0"/>
-              <a:buChar char="•"/>
-            </a:pPr>
+              <a:t>Lowers probability of simultaneous transmissions causing collisions</a:t>
+            </a:r>
+          </a:p>
+          <a:p>
+            <a:r>
+              <a:rPr lang="en-IN" b="1" dirty="0"/>
+              <a:t>Controls Patterns</a:t>
+            </a:r>
+          </a:p>
+          <a:p>
             <a:r>
               <a:rPr lang="en-IN" dirty="0"/>
-              <a:t>Channel state probabilities:</a:t>
-            </a:r>
-          </a:p>
-          <a:p>
-            <a:pPr marL="571500" indent="-571500">
-              <a:lnSpc>
-                <a:spcPct val="150000"/>
-              </a:lnSpc>
-              <a:buFont typeface="Arial" panose="020B0604020202020204" pitchFamily="34" charset="0"/>
-              <a:buChar char="•"/>
-            </a:pPr>
-            <a:r>
-              <a:rPr lang="en-IN" dirty="0" err="1"/>
-              <a:t>P_idle</a:t>
-            </a:r>
-            <a:r>
-              <a:rPr lang="en-IN" dirty="0"/>
-              <a:t> = (1−</a:t>
-            </a:r>
-            <a:r>
-              <a:rPr lang="el-GR" dirty="0"/>
-              <a:t>τ)^</a:t>
-            </a:r>
-            <a:r>
-              <a:rPr lang="en-IN" dirty="0"/>
-              <a:t>N</a:t>
-            </a:r>
-          </a:p>
-          <a:p>
-            <a:pPr marL="571500" indent="-571500">
-              <a:lnSpc>
-                <a:spcPct val="150000"/>
-              </a:lnSpc>
-              <a:buFont typeface="Arial" panose="020B0604020202020204" pitchFamily="34" charset="0"/>
-              <a:buChar char="•"/>
-            </a:pPr>
-            <a:r>
-              <a:rPr lang="en-IN" dirty="0" err="1"/>
-              <a:t>P_success</a:t>
-            </a:r>
-            <a:r>
-              <a:rPr lang="en-IN" dirty="0"/>
-              <a:t> = N</a:t>
-            </a:r>
-            <a:r>
-              <a:rPr lang="el-GR" dirty="0"/>
-              <a:t>τ(1−τ)^(</a:t>
-            </a:r>
-            <a:r>
-              <a:rPr lang="en-IN" dirty="0"/>
-              <a:t>N−1)</a:t>
-            </a:r>
-          </a:p>
-          <a:p>
-            <a:pPr marL="571500" indent="-571500">
-              <a:lnSpc>
-                <a:spcPct val="150000"/>
-              </a:lnSpc>
-              <a:buFont typeface="Arial" panose="020B0604020202020204" pitchFamily="34" charset="0"/>
-              <a:buChar char="•"/>
-            </a:pPr>
-            <a:r>
-              <a:rPr lang="en-IN" dirty="0" err="1"/>
-              <a:t>P_collision</a:t>
-            </a:r>
-            <a:r>
-              <a:rPr lang="en-IN" dirty="0"/>
-              <a:t> = 1 − </a:t>
-            </a:r>
-            <a:r>
-              <a:rPr lang="en-IN" dirty="0" err="1"/>
-              <a:t>P_idle</a:t>
-            </a:r>
-            <a:r>
-              <a:rPr lang="en-IN" dirty="0"/>
-              <a:t> − </a:t>
-            </a:r>
-            <a:r>
-              <a:rPr lang="en-IN" dirty="0" err="1"/>
-              <a:t>P_success</a:t>
-            </a:r>
-            <a:endParaRPr lang="en-IN" dirty="0"/>
+              <a:t>Introduces controlled randomness to break persistent collision patterns</a:t>
+            </a:r>
           </a:p>
           <a:p>
             <a:pPr marL="571500" indent="-571500">
@@ -4951,6 +4901,10 @@
           </p:nvPr>
         </p:nvSpPr>
         <p:spPr>
+          <a:xfrm>
+            <a:off x="2310048" y="576455"/>
+            <a:ext cx="12141200" cy="1595245"/>
+          </a:xfrm>
           <a:prstGeom prst="rect">
             <a:avLst/>
           </a:prstGeom>
@@ -4968,7 +4922,7 @@
             </a:pPr>
             <a:r>
               <a:rPr lang="en-IN" dirty="0"/>
-              <a:t>Simulation Implementation</a:t>
+              <a:t>Implementation of Randomized Strategy</a:t>
             </a:r>
             <a:endParaRPr spc="-32" dirty="0"/>
           </a:p>
@@ -4992,130 +4946,69 @@
         </p:nvSpPr>
         <p:spPr>
           <a:xfrm>
-            <a:off x="1090848" y="2171700"/>
-            <a:ext cx="13360400" cy="7201972"/>
+            <a:off x="1090848" y="2857500"/>
+            <a:ext cx="13360400" cy="4985980"/>
           </a:xfrm>
         </p:spPr>
         <p:txBody>
           <a:bodyPr/>
           <a:lstStyle/>
           <a:p>
-            <a:pPr marL="571500" indent="-571500">
-              <a:buFont typeface="Arial" panose="020B0604020202020204" pitchFamily="34" charset="0"/>
-              <a:buChar char="•"/>
-            </a:pPr>
+            <a:r>
+              <a:rPr lang="en-IN" b="1" dirty="0"/>
+              <a:t>Integration Framework</a:t>
+            </a:r>
+          </a:p>
+          <a:p>
             <a:r>
               <a:rPr lang="en-IN" dirty="0"/>
-              <a:t>Simulation implemented using Python.</a:t>
-            </a:r>
-          </a:p>
-          <a:p>
-            <a:pPr marL="571500" indent="-571500">
-              <a:buFont typeface="Arial" panose="020B0604020202020204" pitchFamily="34" charset="0"/>
-              <a:buChar char="•"/>
-            </a:pPr>
+              <a:t>Modified existing Python simulation with randomized logic</a:t>
+            </a:r>
+          </a:p>
+          <a:p>
+            <a:r>
+              <a:rPr lang="en-IN" b="1" dirty="0" err="1"/>
+              <a:t>Backoff</a:t>
+            </a:r>
+            <a:r>
+              <a:rPr lang="en-IN" b="1" dirty="0"/>
+              <a:t> Selection</a:t>
+            </a:r>
+          </a:p>
+          <a:p>
             <a:r>
               <a:rPr lang="en-IN" dirty="0"/>
-              <a:t>Simulation Method</a:t>
-            </a:r>
-            <a:br>
+              <a:t>Replaced uniform distribution with probabilistic adjustment</a:t>
+            </a:r>
+          </a:p>
+          <a:p>
+            <a:r>
+              <a:rPr lang="en-IN" b="1" dirty="0"/>
+              <a:t>CW Update Rules</a:t>
+            </a:r>
+          </a:p>
+          <a:p>
+            <a:r>
               <a:rPr lang="en-IN" dirty="0"/>
-            </a:br>
+              <a:t>Implemented adaptive window sizing with random parameters</a:t>
+            </a:r>
+          </a:p>
+          <a:p>
+            <a:r>
+              <a:rPr lang="en-IN" b="1" dirty="0"/>
+              <a:t>Monte Carlo Simulation</a:t>
+            </a:r>
+          </a:p>
+          <a:p>
             <a:r>
               <a:rPr lang="en-IN" dirty="0"/>
-              <a:t>- Monte Carlo simulation over many time slots</a:t>
-            </a:r>
-          </a:p>
-          <a:p>
-            <a:pPr marL="571500" indent="-571500">
-              <a:buFont typeface="Arial" panose="020B0604020202020204" pitchFamily="34" charset="0"/>
-              <a:buChar char="•"/>
-            </a:pPr>
-            <a:r>
-              <a:rPr lang="en-IN" dirty="0"/>
-              <a:t>Simulation Parameters</a:t>
-            </a:r>
-          </a:p>
-          <a:p>
-            <a:pPr marL="571500" indent="-571500">
-              <a:buFont typeface="Arial" panose="020B0604020202020204" pitchFamily="34" charset="0"/>
-              <a:buChar char="•"/>
-            </a:pPr>
-            <a:r>
-              <a:rPr lang="en-IN" dirty="0"/>
-              <a:t>- Number of nodes: N = 10</a:t>
-            </a:r>
-            <a:br>
-              <a:rPr lang="en-IN" dirty="0"/>
-            </a:br>
-            <a:r>
-              <a:rPr lang="en-IN" dirty="0"/>
-              <a:t>- Number of slots simulated: 50,000</a:t>
-            </a:r>
-            <a:br>
-              <a:rPr lang="en-IN" dirty="0"/>
-            </a:br>
-            <a:r>
-              <a:rPr lang="en-IN" dirty="0"/>
-              <a:t>- Minimum contention window: </a:t>
+              <a:t>Multiple runs to characterize probabilistic </a:t>
             </a:r>
             <a:r>
               <a:rPr lang="en-IN" dirty="0" err="1"/>
-              <a:t>CWmin</a:t>
-            </a:r>
-            <a:r>
-              <a:rPr lang="en-IN" dirty="0"/>
-              <a:t> = 4</a:t>
-            </a:r>
-            <a:br>
-              <a:rPr lang="en-IN" dirty="0"/>
-            </a:br>
-            <a:r>
-              <a:rPr lang="en-IN" dirty="0"/>
-              <a:t>- Maximum contention window: </a:t>
-            </a:r>
-            <a:r>
-              <a:rPr lang="en-IN" dirty="0" err="1"/>
-              <a:t>CWmax</a:t>
-            </a:r>
-            <a:r>
-              <a:rPr lang="en-IN" dirty="0"/>
-              <a:t> = 1024</a:t>
-            </a:r>
-          </a:p>
-          <a:p>
-            <a:pPr marL="571500" indent="-571500">
-              <a:buFont typeface="Arial" panose="020B0604020202020204" pitchFamily="34" charset="0"/>
-              <a:buChar char="•"/>
-            </a:pPr>
-            <a:r>
-              <a:rPr lang="en-IN" dirty="0"/>
-              <a:t>Evaluation Metrics</a:t>
-            </a:r>
-          </a:p>
-          <a:p>
-            <a:pPr marL="571500" indent="-571500">
-              <a:buFont typeface="Arial" panose="020B0604020202020204" pitchFamily="34" charset="0"/>
-              <a:buChar char="•"/>
-            </a:pPr>
-            <a:r>
-              <a:rPr lang="en-IN" dirty="0"/>
-              <a:t>- Throughput</a:t>
-            </a:r>
-            <a:br>
-              <a:rPr lang="en-IN" dirty="0"/>
-            </a:br>
-            <a:r>
-              <a:rPr lang="en-IN" dirty="0"/>
-              <a:t>- Collision rate</a:t>
-            </a:r>
-            <a:br>
-              <a:rPr lang="en-IN" dirty="0"/>
-            </a:br>
-            <a:r>
-              <a:rPr lang="en-IN" dirty="0"/>
-              <a:t>- Channel utilization</a:t>
-            </a:r>
+              <a:t>behavio</a:t>
+            </a:r>
+            <a:endParaRPr lang="en-IN" dirty="0"/>
           </a:p>
           <a:p>
             <a:pPr marL="571500" indent="-571500">
